--- a/slides/Toan12/Slide_TOAN12_Bai4_T14-18.pptx
+++ b/slides/Toan12/Slide_TOAN12_Bai4_T14-18.pptx
@@ -4310,7 +4310,7 @@
                 </a:r>
                 <a:r>
                   <a:rPr lang="vi-VN"/>
-                  <a:t>y=\frac{x^2-x-1}{x-2}=x+1+\frac{1}{x-2}</a:t>
+                  <a:t>y=\frac{x^2−x−1}{x−2}=x+1+\frac{1}{x−2}</a:t>
                 </a:r>
               </a:p>
               <a:p>
@@ -4866,7 +4866,7 @@
                 </a:pPr>
                 <a:r>
                   <a:rPr lang="vi-VN"/>
-                  <a:t>y=x-\frac{2}{x+1}</a:t>
+                  <a:t>y=x−\frac{2}{x+1}</a:t>
                 </a:r>
                 <a:r>
                   <a:rPr sz="2200">
@@ -4921,7 +4921,7 @@
                 </a:r>
                 <a:r>
                   <a:rPr lang="vi-VN"/>
-                  <a:t>y=-x+1+\frac{1}{x-2}</a:t>
+                  <a:t>y=−x+1+\frac{1}{x−2}</a:t>
                 </a:r>
                 <a:r>
                   <a:rPr sz="2200">
@@ -5461,7 +5461,7 @@
                 </a:r>
                 <a:r>
                   <a:rPr lang="vi-VN"/>
-                  <a:t>y=x^3-3x^2+4</a:t>
+                  <a:t>y=x^3−3x^2+4</a:t>
                 </a:r>
                 <a:r>
                   <a:rPr sz="2400">
@@ -5531,7 +5531,7 @@
                 </a:r>
                 <a:r>
                   <a:rPr lang="vi-VN"/>
-                  <a:t>y=\frac{2x-1}{x+1}</a:t>
+                  <a:t>y=\frac{2x−1}{x+1}</a:t>
                 </a:r>
                 <a:r>
                   <a:rPr sz="2400">
@@ -9321,7 +9321,7 @@
                 </a:r>
                 <a:r>
                   <a:rPr lang="vi-VN"/>
-                  <a:t>y=-x^3+3x^2-4</a:t>
+                  <a:t>y=−x^3+3x^2−4</a:t>
                 </a:r>
               </a:p>
               <a:p>
@@ -10327,7 +10327,7 @@
                 </a:pPr>
                 <a:r>
                   <a:rPr lang="vi-VN"/>
-                  <a:t>y=-2x^3+3x^2-5x</a:t>
+                  <a:t>y=−2x^3+3x^2−5x</a:t>
                 </a:r>
                 <a:r>
                   <a:rPr sz="2200">
@@ -10373,7 +10373,7 @@
                 </a:pPr>
                 <a:r>
                   <a:rPr lang="vi-VN"/>
-                  <a:t>y=-x^3+3x+1</a:t>
+                  <a:t>y=−x^3+3x+1</a:t>
                 </a:r>
                 <a:r>
                   <a:rPr sz="2200">
@@ -10893,7 +10893,7 @@
                 </a:r>
                 <a:r>
                   <a:rPr lang="vi-VN"/>
-                  <a:t>y=\frac{x+1}{x-2}</a:t>
+                  <a:t>y=\frac{x+1}{x−2}</a:t>
                 </a:r>
               </a:p>
               <a:p>
@@ -10909,7 +10909,7 @@
                 </a:pPr>
                 <a:r>
                   <a:rPr lang="vi-VN"/>
-                  <a:t>y'=−\frac{3}{(x-2)^2}&lt;0</a:t>
+                  <a:t>y'=−\frac{3}{(x−2)^2}&lt;0</a:t>
                 </a:r>
                 <a:r>
                   <a:rPr sz="2400">
